--- a/week_4/reconaissance_presentation.pptx
+++ b/week_4/reconaissance_presentation.pptx
@@ -16,6 +16,7 @@
     <p:sldId id="262" r:id="rId11"/>
     <p:sldId id="263" r:id="rId12"/>
     <p:sldId id="264" r:id="rId13"/>
+    <p:sldId id="265" r:id="rId14"/>
   </p:sldIdLst>
   <p:sldSz cx="10080625" cy="5670550"/>
   <p:notesSz cx="7559675" cy="10691813"/>
@@ -725,7 +726,7 @@
         <p:txBody>
           <a:bodyPr/>
           <a:p>
-            <a:fld id="{4FB1F0E3-392E-4A4C-92C3-F822DFD0C734}" type="slidenum">
+            <a:fld id="{2B3DC534-892C-4205-8FD1-9071F1D53026}" type="slidenum">
               <a:t>&lt;#&gt;</a:t>
             </a:fld>
           </a:p>
@@ -888,7 +889,7 @@
         <p:txBody>
           <a:bodyPr/>
           <a:p>
-            <a:fld id="{2B6DF4F9-856B-4575-8979-8F143DE30866}" type="slidenum">
+            <a:fld id="{A26ABFA9-BF10-4D5B-A49A-52A37FA91235}" type="slidenum">
               <a:t>&lt;#&gt;</a:t>
             </a:fld>
           </a:p>
@@ -1048,7 +1049,7 @@
         <p:txBody>
           <a:bodyPr/>
           <a:p>
-            <a:fld id="{9F1359C6-0301-4E62-95C5-0A64BE0363C9}" type="slidenum">
+            <a:fld id="{9EE16F73-0A69-4FCA-BA65-4B69269CB2DE}" type="slidenum">
               <a:t>&lt;#&gt;</a:t>
             </a:fld>
           </a:p>
@@ -1245,7 +1246,7 @@
         <p:txBody>
           <a:bodyPr/>
           <a:p>
-            <a:fld id="{8B0E4ABE-ECAE-4A50-82C8-83ECEB06789F}" type="slidenum">
+            <a:fld id="{C5A7C648-B4F8-4957-B794-EF38D0B20310}" type="slidenum">
               <a:t>&lt;#&gt;</a:t>
             </a:fld>
           </a:p>
@@ -1368,7 +1369,7 @@
         <p:txBody>
           <a:bodyPr/>
           <a:p>
-            <a:fld id="{05F167B6-2F61-4B63-A40B-2E552B33E7AF}" type="slidenum">
+            <a:fld id="{6B323350-54ED-4D9D-A215-840DDC58F7CE}" type="slidenum">
               <a:t>&lt;#&gt;</a:t>
             </a:fld>
           </a:p>
@@ -1491,7 +1492,7 @@
         <p:txBody>
           <a:bodyPr/>
           <a:p>
-            <a:fld id="{2054AF2D-0A19-4CAC-9E79-16F0778295A9}" type="slidenum">
+            <a:fld id="{9B073587-949D-4645-9B25-545F70A82845}" type="slidenum">
               <a:t>&lt;#&gt;</a:t>
             </a:fld>
           </a:p>
@@ -1725,7 +1726,7 @@
         <p:txBody>
           <a:bodyPr/>
           <a:p>
-            <a:fld id="{280393C6-BC65-4B6C-8E22-BEEC3056F0B4}" type="slidenum">
+            <a:fld id="{B5C0DE24-B0C2-41E1-987E-5B59CD06B5BB}" type="slidenum">
               <a:t>&lt;#&gt;</a:t>
             </a:fld>
           </a:p>
@@ -2061,7 +2062,7 @@
         <p:txBody>
           <a:bodyPr/>
           <a:p>
-            <a:fld id="{82A1A156-4A88-42C6-8CB1-B27C3645986C}" type="slidenum">
+            <a:fld id="{B8BA4760-51EE-4D33-B265-E9987802F6CC}" type="slidenum">
               <a:t>&lt;#&gt;</a:t>
             </a:fld>
           </a:p>
@@ -2295,7 +2296,7 @@
         <p:txBody>
           <a:bodyPr/>
           <a:p>
-            <a:fld id="{68AF6BC8-91FC-467A-9FB8-BD790A60F752}" type="slidenum">
+            <a:fld id="{332EFDC7-D881-4704-BAB2-E110A71CEF99}" type="slidenum">
               <a:t>&lt;#&gt;</a:t>
             </a:fld>
           </a:p>
@@ -2492,7 +2493,7 @@
         <p:txBody>
           <a:bodyPr/>
           <a:p>
-            <a:fld id="{90827D96-9B57-494E-BCAB-7AE61B9C954D}" type="slidenum">
+            <a:fld id="{F2F2BA95-A099-42DE-81EB-C7C6576B0EE3}" type="slidenum">
               <a:t>&lt;#&gt;</a:t>
             </a:fld>
           </a:p>
@@ -2763,7 +2764,7 @@
         <p:txBody>
           <a:bodyPr/>
           <a:p>
-            <a:fld id="{71AD1208-CB85-471C-ADBF-42F0591D0508}" type="slidenum">
+            <a:fld id="{1F7ACEE5-021B-4DD2-981D-2A9106D1265D}" type="slidenum">
               <a:t>&lt;#&gt;</a:t>
             </a:fld>
           </a:p>
@@ -3108,7 +3109,7 @@
         <p:txBody>
           <a:bodyPr/>
           <a:p>
-            <a:fld id="{201BF7DA-40B5-4C4C-87D8-79E71894EF45}" type="slidenum">
+            <a:fld id="{9BCB1165-0B05-4536-B4B8-A89CD59A390F}" type="slidenum">
               <a:t>&lt;#&gt;</a:t>
             </a:fld>
           </a:p>
@@ -3191,7 +3192,7 @@
         <p:txBody>
           <a:bodyPr/>
           <a:p>
-            <a:fld id="{A53297E8-EB3D-4C80-8875-4870A05EDFA0}" type="slidenum">
+            <a:fld id="{CE9E0030-FC6F-4134-9F44-C9CC64A12045}" type="slidenum">
               <a:t>&lt;#&gt;</a:t>
             </a:fld>
           </a:p>
@@ -3354,7 +3355,7 @@
         <p:txBody>
           <a:bodyPr/>
           <a:p>
-            <a:fld id="{54C9D82C-7A2F-4C33-BFBC-709F494390EB}" type="slidenum">
+            <a:fld id="{FBB1AFCD-03C4-44B9-AF7E-7FEB53A39670}" type="slidenum">
               <a:t>&lt;#&gt;</a:t>
             </a:fld>
           </a:p>
@@ -3514,7 +3515,7 @@
         <p:txBody>
           <a:bodyPr/>
           <a:p>
-            <a:fld id="{772E3818-DF1D-4125-8955-0C2F82872525}" type="slidenum">
+            <a:fld id="{7CDC3329-BDDA-4347-90C4-EBF686F5312E}" type="slidenum">
               <a:t>&lt;#&gt;</a:t>
             </a:fld>
           </a:p>
@@ -3711,7 +3712,7 @@
         <p:txBody>
           <a:bodyPr/>
           <a:p>
-            <a:fld id="{8B969E12-818D-478D-A534-3265C6F74247}" type="slidenum">
+            <a:fld id="{A16787C0-C3DA-49BB-A163-625DB4ADEFE4}" type="slidenum">
               <a:t>&lt;#&gt;</a:t>
             </a:fld>
           </a:p>
@@ -3834,7 +3835,7 @@
         <p:txBody>
           <a:bodyPr/>
           <a:p>
-            <a:fld id="{082233E4-9C3A-4B40-BFD3-9C3C6CE58799}" type="slidenum">
+            <a:fld id="{CBCEF779-8249-4F0C-8215-8635E84D6B9A}" type="slidenum">
               <a:t>&lt;#&gt;</a:t>
             </a:fld>
           </a:p>
@@ -4056,7 +4057,7 @@
         <p:txBody>
           <a:bodyPr/>
           <a:p>
-            <a:fld id="{457EC8F1-54FF-463F-9116-B8AA03137213}" type="slidenum">
+            <a:fld id="{B725EF92-0BC8-434F-BE57-9872153A4A7F}" type="slidenum">
               <a:t>&lt;#&gt;</a:t>
             </a:fld>
           </a:p>
@@ -4290,7 +4291,7 @@
         <p:txBody>
           <a:bodyPr/>
           <a:p>
-            <a:fld id="{6D9AD3D0-3E46-4E51-A4E1-F800C0F35D46}" type="slidenum">
+            <a:fld id="{ADC86517-C38C-4D48-B14B-8CA7B6DC064F}" type="slidenum">
               <a:t>&lt;#&gt;</a:t>
             </a:fld>
           </a:p>
@@ -4524,7 +4525,7 @@
         <p:txBody>
           <a:bodyPr/>
           <a:p>
-            <a:fld id="{2751D8D0-09C4-41DC-91F8-A1A92B5D2C88}" type="slidenum">
+            <a:fld id="{3269C74F-F750-482E-A170-44A74EA90A35}" type="slidenum">
               <a:t>&lt;#&gt;</a:t>
             </a:fld>
           </a:p>
@@ -4758,7 +4759,7 @@
         <p:txBody>
           <a:bodyPr/>
           <a:p>
-            <a:fld id="{160CFD42-9951-4447-9F58-CDD62A9134EE}" type="slidenum">
+            <a:fld id="{8C0BC4AA-A345-4A64-9306-CB856FBE4B5C}" type="slidenum">
               <a:t>&lt;#&gt;</a:t>
             </a:fld>
           </a:p>
@@ -4955,7 +4956,7 @@
         <p:txBody>
           <a:bodyPr/>
           <a:p>
-            <a:fld id="{A3A8BDEF-02C0-4877-A234-EC4DF611805D}" type="slidenum">
+            <a:fld id="{4A5928A0-AEB4-4172-BAD0-5A3E7D4B99C0}" type="slidenum">
               <a:t>&lt;#&gt;</a:t>
             </a:fld>
           </a:p>
@@ -5226,7 +5227,7 @@
         <p:txBody>
           <a:bodyPr/>
           <a:p>
-            <a:fld id="{26F9FA70-F1DA-4861-A2CC-DC5F7243E1A4}" type="slidenum">
+            <a:fld id="{92CD89AF-410E-4ADA-85A0-2BFE2116FEF7}" type="slidenum">
               <a:t>&lt;#&gt;</a:t>
             </a:fld>
           </a:p>
@@ -5571,7 +5572,7 @@
         <p:txBody>
           <a:bodyPr/>
           <a:p>
-            <a:fld id="{A913DCA6-DC20-4E8B-A735-EBCC1A451A96}" type="slidenum">
+            <a:fld id="{CB315290-92EB-4A4F-964F-CAE4283D75EA}" type="slidenum">
               <a:t>&lt;#&gt;</a:t>
             </a:fld>
           </a:p>
@@ -6828,7 +6829,7 @@
             <a:pPr algn="r">
               <a:buNone/>
             </a:pPr>
-            <a:fld id="{334CCA9F-F2BA-41DD-8C58-E7FDA6DD627A}" type="slidenum">
+            <a:fld id="{8D7B5986-061B-4230-AC01-AB9AFB340BF1}" type="slidenum">
               <a:rPr b="0" lang="en-US" sz="1400" spc="-1" strike="noStrike">
                 <a:solidFill>
                   <a:srgbClr val="ffffff"/>
@@ -7397,7 +7398,7 @@
             <a:pPr algn="r">
               <a:buNone/>
             </a:pPr>
-            <a:fld id="{4A3A32A7-9091-4D1E-B06C-CFF0EEA340E0}" type="slidenum">
+            <a:fld id="{A57E7B04-3DDB-466D-9856-9A619677B473}" type="slidenum">
               <a:rPr b="0" lang="en-US" sz="1400" spc="-1" strike="noStrike">
                 <a:solidFill>
                   <a:srgbClr val="ffffff"/>
@@ -7966,7 +7967,7 @@
             <a:pPr algn="r">
               <a:buNone/>
             </a:pPr>
-            <a:fld id="{D28CB7AC-331D-4CB7-86E3-04FE6D463278}" type="slidenum">
+            <a:fld id="{3812A4C9-74E9-4E96-91C9-A4CB9756BFD3}" type="slidenum">
               <a:rPr b="0" lang="en-US" sz="1400" spc="-1" strike="noStrike">
                 <a:solidFill>
                   <a:srgbClr val="ffffff"/>
@@ -8282,7 +8283,7 @@
         <p:txBody>
           <a:bodyPr/>
           <a:p>
-            <a:fld id="{834CAB83-CD26-47A3-8493-7C5A03797F58}" type="slidenum">
+            <a:fld id="{D698EF86-AA5C-48F7-B3F5-28956C9498E6}" type="slidenum">
               <a:t>1</a:t>
             </a:fld>
           </a:p>
@@ -8302,7 +8303,278 @@
         <p:txBody>
           <a:bodyPr/>
           <a:p>
-            <a:fld id="{0A792ADE-781E-4514-994B-59413E381BF9}" type="datetime1">
+            <a:fld id="{91318E36-CC05-42F8-94FD-069B4B645A08}" type="datetime1">
+              <a:rPr lang="en-US"/>
+              <a:t>10/01/2026</a:t>
+            </a:fld>
+          </a:p>
+        </p:txBody>
+      </p:sp>
+    </p:spTree>
+  </p:cSld>
+  <mc:AlternateContent>
+    <mc:Choice Requires="p14">
+      <p:transition spd="slow" p14:dur="2000"/>
+    </mc:Choice>
+    <mc:Fallback>
+      <p:transition spd="slow"/>
+    </mc:Fallback>
+  </mc:AlternateContent>
+</p:sld>
+</file>
+
+<file path=ppt/slides/slide10.xml><?xml version="1.0" encoding="utf-8"?>
+<p:sld xmlns:a="http://schemas.openxmlformats.org/drawingml/2006/main" xmlns:p="http://schemas.openxmlformats.org/presentationml/2006/main" xmlns:r="http://schemas.openxmlformats.org/officeDocument/2006/relationships" xmlns:p14="http://schemas.microsoft.com/office/powerpoint/2010/main" xmlns:p15="http://schemas.microsoft.com/office/powerpoint/2012/main" xmlns:mc="http://schemas.openxmlformats.org/markup-compatibility/2006">
+  <p:cSld>
+    <p:spTree>
+      <p:nvGrpSpPr>
+        <p:cNvPr id="1" name=""/>
+        <p:cNvGrpSpPr/>
+        <p:nvPr/>
+      </p:nvGrpSpPr>
+      <p:grpSpPr>
+        <a:xfrm>
+          <a:off x="0" y="0"/>
+          <a:ext cx="0" cy="0"/>
+          <a:chOff x="0" y="0"/>
+          <a:chExt cx="0" cy="0"/>
+        </a:xfrm>
+      </p:grpSpPr>
+      <p:sp>
+        <p:nvSpPr>
+          <p:cNvPr id="146" name="PlaceHolder 1"/>
+          <p:cNvSpPr>
+            <a:spLocks noGrp="1"/>
+          </p:cNvSpPr>
+          <p:nvPr>
+            <p:ph type="title"/>
+          </p:nvPr>
+        </p:nvSpPr>
+        <p:spPr>
+          <a:xfrm>
+            <a:off x="360000" y="180000"/>
+            <a:ext cx="9360000" cy="478080"/>
+          </a:xfrm>
+          <a:prstGeom prst="rect">
+            <a:avLst/>
+          </a:prstGeom>
+          <a:noFill/>
+          <a:ln w="0">
+            <a:noFill/>
+          </a:ln>
+        </p:spPr>
+        <p:txBody>
+          <a:bodyPr lIns="0" rIns="0" tIns="0" bIns="0" anchor="ctr">
+            <a:noAutofit/>
+          </a:bodyPr>
+          <a:p>
+            <a:pPr algn="ctr">
+              <a:buNone/>
+            </a:pPr>
+            <a:r>
+              <a:rPr b="0" lang="en-US" sz="3300" spc="-1" strike="noStrike">
+                <a:solidFill>
+                  <a:srgbClr val="ffffff"/>
+                </a:solidFill>
+                <a:latin typeface="Arial"/>
+              </a:rPr>
+              <a:t>Other Sources</a:t>
+            </a:r>
+            <a:endParaRPr b="0" lang="en-US" sz="3300" spc="-1" strike="noStrike">
+              <a:solidFill>
+                <a:srgbClr val="ffffff"/>
+              </a:solidFill>
+              <a:latin typeface="Arial"/>
+            </a:endParaRPr>
+          </a:p>
+        </p:txBody>
+      </p:sp>
+      <p:sp>
+        <p:nvSpPr>
+          <p:cNvPr id="147" name="PlaceHolder 2"/>
+          <p:cNvSpPr>
+            <a:spLocks noGrp="1"/>
+          </p:cNvSpPr>
+          <p:nvPr>
+            <p:ph/>
+          </p:nvPr>
+        </p:nvSpPr>
+        <p:spPr>
+          <a:xfrm>
+            <a:off x="360000" y="1080000"/>
+            <a:ext cx="9360000" cy="3600000"/>
+          </a:xfrm>
+          <a:prstGeom prst="rect">
+            <a:avLst/>
+          </a:prstGeom>
+          <a:noFill/>
+          <a:ln w="0">
+            <a:noFill/>
+          </a:ln>
+        </p:spPr>
+        <p:txBody>
+          <a:bodyPr lIns="0" rIns="0" tIns="0" bIns="0" anchor="t">
+            <a:noAutofit/>
+          </a:bodyPr>
+          <a:p>
+            <a:pPr marL="432000" indent="-324000">
+              <a:spcBef>
+                <a:spcPts val="1060"/>
+              </a:spcBef>
+              <a:buClr>
+                <a:srgbClr val="77caee"/>
+              </a:buClr>
+              <a:buSzPct val="45000"/>
+              <a:buFont typeface="Wingdings" charset="2"/>
+              <a:buChar char=""/>
+            </a:pPr>
+            <a:r>
+              <a:rPr b="0" lang="en-US" sz="2400" spc="-1" strike="noStrike">
+                <a:solidFill>
+                  <a:srgbClr val="009bdd"/>
+                </a:solidFill>
+                <a:latin typeface="Arial"/>
+              </a:rPr>
+              <a:t>https://github.com/Dogru-Isim/CTF_Workbooks/blob/main/week_4/</a:t>
+            </a:r>
+            <a:endParaRPr b="0" lang="en-US" sz="2400" spc="-1" strike="noStrike">
+              <a:solidFill>
+                <a:srgbClr val="009bdd"/>
+              </a:solidFill>
+              <a:latin typeface="Arial"/>
+            </a:endParaRPr>
+          </a:p>
+          <a:p>
+            <a:pPr marL="432000" indent="-324000">
+              <a:spcBef>
+                <a:spcPts val="1060"/>
+              </a:spcBef>
+              <a:buClr>
+                <a:srgbClr val="77caee"/>
+              </a:buClr>
+              <a:buSzPct val="45000"/>
+              <a:buFont typeface="Wingdings" charset="2"/>
+              <a:buChar char=""/>
+            </a:pPr>
+            <a:endParaRPr b="0" lang="en-US" sz="2400" spc="-1" strike="noStrike">
+              <a:solidFill>
+                <a:srgbClr val="009bdd"/>
+              </a:solidFill>
+              <a:latin typeface="Arial"/>
+            </a:endParaRPr>
+          </a:p>
+          <a:p>
+            <a:pPr marL="432000" indent="-324000">
+              <a:spcBef>
+                <a:spcPts val="1060"/>
+              </a:spcBef>
+              <a:buClr>
+                <a:srgbClr val="77caee"/>
+              </a:buClr>
+              <a:buSzPct val="45000"/>
+              <a:buFont typeface="Wingdings" charset="2"/>
+              <a:buChar char=""/>
+            </a:pPr>
+            <a:r>
+              <a:rPr b="0" lang="en-US" sz="2400" spc="-1" strike="noStrike">
+                <a:solidFill>
+                  <a:srgbClr val="009bdd"/>
+                </a:solidFill>
+                <a:latin typeface="Arial"/>
+              </a:rPr>
+              <a:t>https://www.youtube.com/watch?v=evyxNUzl-HA&amp;pp=ygUhYnVnIGJvdW50eSByZWNvbmFpc3NhbmNlIGJsYWNraGF0</a:t>
+            </a:r>
+            <a:endParaRPr b="0" lang="en-US" sz="2400" spc="-1" strike="noStrike">
+              <a:solidFill>
+                <a:srgbClr val="009bdd"/>
+              </a:solidFill>
+              <a:latin typeface="Arial"/>
+            </a:endParaRPr>
+          </a:p>
+          <a:p>
+            <a:pPr marL="432000" indent="-324000">
+              <a:spcBef>
+                <a:spcPts val="1060"/>
+              </a:spcBef>
+              <a:buClr>
+                <a:srgbClr val="77caee"/>
+              </a:buClr>
+              <a:buSzPct val="45000"/>
+              <a:buFont typeface="Wingdings" charset="2"/>
+              <a:buChar char=""/>
+            </a:pPr>
+            <a:endParaRPr b="0" lang="en-US" sz="2400" spc="-1" strike="noStrike">
+              <a:solidFill>
+                <a:srgbClr val="009bdd"/>
+              </a:solidFill>
+              <a:latin typeface="Arial"/>
+            </a:endParaRPr>
+          </a:p>
+          <a:p>
+            <a:pPr marL="432000" indent="-324000">
+              <a:spcBef>
+                <a:spcPts val="1060"/>
+              </a:spcBef>
+              <a:buClr>
+                <a:srgbClr val="77caee"/>
+              </a:buClr>
+              <a:buSzPct val="45000"/>
+              <a:buFont typeface="Wingdings" charset="2"/>
+              <a:buChar char=""/>
+            </a:pPr>
+            <a:r>
+              <a:rPr b="0" lang="en-US" sz="2400" spc="-1" strike="noStrike">
+                <a:solidFill>
+                  <a:srgbClr val="009bdd"/>
+                </a:solidFill>
+                <a:latin typeface="Arial"/>
+              </a:rPr>
+              <a:t>https://www.youtube.com/watch?v=B1YcflQRvOI&amp;pp=ygUUbW9kZXJuIHJlY29uYWlzc2FuY2U%3D</a:t>
+            </a:r>
+            <a:endParaRPr b="0" lang="en-US" sz="2400" spc="-1" strike="noStrike">
+              <a:solidFill>
+                <a:srgbClr val="009bdd"/>
+              </a:solidFill>
+              <a:latin typeface="Arial"/>
+            </a:endParaRPr>
+          </a:p>
+        </p:txBody>
+      </p:sp>
+      <p:sp>
+        <p:nvSpPr>
+          <p:cNvPr id="4" name="PlaceHolder 3"/>
+          <p:cNvSpPr>
+            <a:spLocks noGrp="1"/>
+          </p:cNvSpPr>
+          <p:nvPr>
+            <p:ph type="sldNum" idx="6"/>
+          </p:nvPr>
+        </p:nvSpPr>
+        <p:spPr/>
+        <p:txBody>
+          <a:bodyPr/>
+          <a:p>
+            <a:fld id="{7017B085-84E0-4192-9141-B331BFF22D24}" type="slidenum">
+              <a:t>10</a:t>
+            </a:fld>
+          </a:p>
+        </p:txBody>
+      </p:sp>
+      <p:sp>
+        <p:nvSpPr>
+          <p:cNvPr id="5" name="PlaceHolder 4"/>
+          <p:cNvSpPr>
+            <a:spLocks noGrp="1"/>
+          </p:cNvSpPr>
+          <p:nvPr>
+            <p:ph type="dt" idx="4"/>
+          </p:nvPr>
+        </p:nvSpPr>
+        <p:spPr/>
+        <p:txBody>
+          <a:bodyPr/>
+          <a:p>
+            <a:fld id="{DA4E9AF9-D0EB-4940-91F7-0870B0FDBE55}" type="datetime1">
               <a:rPr lang="en-US"/>
               <a:t>10/01/2026</a:t>
             </a:fld>
@@ -8553,7 +8825,7 @@
         <p:txBody>
           <a:bodyPr/>
           <a:p>
-            <a:fld id="{F2883CB8-A62B-45CB-9B81-5FD00D7C40AF}" type="slidenum">
+            <a:fld id="{CDF3E291-4E54-4C97-B739-088C808CFFED}" type="slidenum">
               <a:t>2</a:t>
             </a:fld>
           </a:p>
@@ -8573,7 +8845,7 @@
         <p:txBody>
           <a:bodyPr/>
           <a:p>
-            <a:fld id="{493A1D63-012F-456F-9A0D-92A30CE679B6}" type="datetime1">
+            <a:fld id="{981B30D8-F8A9-4132-B829-2E34210FC2EC}" type="datetime1">
               <a:rPr lang="en-US"/>
               <a:t>10/01/2026</a:t>
             </a:fld>
@@ -8852,7 +9124,7 @@
         <p:txBody>
           <a:bodyPr/>
           <a:p>
-            <a:fld id="{67A1FC98-235F-4F25-85B6-CF5E890CD9AF}" type="slidenum">
+            <a:fld id="{0B01A526-3777-4491-BBEB-E305E477F466}" type="slidenum">
               <a:t>3</a:t>
             </a:fld>
           </a:p>
@@ -8872,7 +9144,7 @@
         <p:txBody>
           <a:bodyPr/>
           <a:p>
-            <a:fld id="{DAF4ED46-2844-4F32-A380-E48092323676}" type="datetime1">
+            <a:fld id="{C12076BD-3D71-47E0-A4BF-7ECEB3C9B676}" type="datetime1">
               <a:rPr lang="en-US"/>
               <a:t>10/01/2026</a:t>
             </a:fld>
@@ -9123,7 +9395,7 @@
         <p:txBody>
           <a:bodyPr/>
           <a:p>
-            <a:fld id="{EA146E26-D8D1-42A8-AD22-A8096109198C}" type="slidenum">
+            <a:fld id="{1519086C-1E6F-480B-863C-575BEA81C983}" type="slidenum">
               <a:t>4</a:t>
             </a:fld>
           </a:p>
@@ -9143,7 +9415,7 @@
         <p:txBody>
           <a:bodyPr/>
           <a:p>
-            <a:fld id="{A8201140-4841-484B-A7A4-9BA2F1BD2B9B}" type="datetime1">
+            <a:fld id="{EDDE2EA8-C0F7-4385-9E5B-9C5D5D05D26C}" type="datetime1">
               <a:rPr lang="en-US"/>
               <a:t>10/01/2026</a:t>
             </a:fld>
@@ -9347,7 +9619,7 @@
         <p:txBody>
           <a:bodyPr/>
           <a:p>
-            <a:fld id="{F270EC0D-5ADE-4EB3-B369-CA0F5C56AA7A}" type="slidenum">
+            <a:fld id="{16BC148B-B9C6-4001-A21D-4FE615EE90D2}" type="slidenum">
               <a:t>5</a:t>
             </a:fld>
           </a:p>
@@ -9367,7 +9639,7 @@
         <p:txBody>
           <a:bodyPr/>
           <a:p>
-            <a:fld id="{FB248626-16BE-4AC4-987B-F938408992C2}" type="datetime1">
+            <a:fld id="{702E4E40-06FE-4251-8B96-BC8A0D47EE73}" type="datetime1">
               <a:rPr lang="en-US"/>
               <a:t>10/01/2026</a:t>
             </a:fld>
@@ -9571,7 +9843,7 @@
         <p:txBody>
           <a:bodyPr/>
           <a:p>
-            <a:fld id="{4C4A5E25-F827-492A-ABF9-0ADCD6A3E557}" type="slidenum">
+            <a:fld id="{F0A0031E-485E-40AF-8C06-662C702F5773}" type="slidenum">
               <a:t>6</a:t>
             </a:fld>
           </a:p>
@@ -9591,7 +9863,7 @@
         <p:txBody>
           <a:bodyPr/>
           <a:p>
-            <a:fld id="{BEA203A6-C37A-43D0-84D2-933B23944860}" type="datetime1">
+            <a:fld id="{410EA653-5DC4-47FB-BFE3-14A0BC5378D2}" type="datetime1">
               <a:rPr lang="en-US"/>
               <a:t>10/01/2026</a:t>
             </a:fld>
@@ -9937,7 +10209,7 @@
         <p:txBody>
           <a:bodyPr/>
           <a:p>
-            <a:fld id="{B8921D6F-6A2C-4F6F-AB72-66EA35572BA4}" type="slidenum">
+            <a:fld id="{FE485CE7-2941-41CD-8AB3-552379C9EF72}" type="slidenum">
               <a:t>7</a:t>
             </a:fld>
           </a:p>
@@ -9957,7 +10229,7 @@
         <p:txBody>
           <a:bodyPr/>
           <a:p>
-            <a:fld id="{25C741CE-9CC2-4E03-A14E-093A8C859989}" type="datetime1">
+            <a:fld id="{22912E1B-E6B9-400B-9AA3-9FB291759787}" type="datetime1">
               <a:rPr lang="en-US"/>
               <a:t>10/01/2026</a:t>
             </a:fld>
@@ -10208,7 +10480,7 @@
         <p:txBody>
           <a:bodyPr/>
           <a:p>
-            <a:fld id="{A9F5DBD2-CB16-4DD7-9079-9361B4E01A6E}" type="slidenum">
+            <a:fld id="{BE86401D-670F-435C-A775-554D8A5F676B}" type="slidenum">
               <a:t>8</a:t>
             </a:fld>
           </a:p>
@@ -10228,7 +10500,7 @@
         <p:txBody>
           <a:bodyPr/>
           <a:p>
-            <a:fld id="{01C0E44D-CE0F-4D5B-A8DA-1A524E32AAEE}" type="datetime1">
+            <a:fld id="{B7A336B9-0582-409A-BEF6-C7556C4097F6}" type="datetime1">
               <a:rPr lang="en-US"/>
               <a:t>10/01/2026</a:t>
             </a:fld>
@@ -10479,7 +10751,7 @@
         <p:txBody>
           <a:bodyPr/>
           <a:p>
-            <a:fld id="{5D1E4403-C2EB-43A7-8C67-CD0B5ADB2249}" type="slidenum">
+            <a:fld id="{B7A03086-9E66-4C6D-8D03-1B60266DAF16}" type="slidenum">
               <a:t>9</a:t>
             </a:fld>
           </a:p>
@@ -10499,7 +10771,7 @@
         <p:txBody>
           <a:bodyPr/>
           <a:p>
-            <a:fld id="{289783B9-C41D-49E8-9DE0-38A16CBE2314}" type="datetime1">
+            <a:fld id="{C79BA5A4-A546-4AF2-B7F1-1BE5C93E2F0D}" type="datetime1">
               <a:rPr lang="en-US"/>
               <a:t>10/01/2026</a:t>
             </a:fld>
